--- a/TA7/advanced python.pptx
+++ b/TA7/advanced python.pptx
@@ -277,7 +277,7 @@
             <a:fld id="{B61BEF0D-F0BB-DE4B-95CE-6DB70DBA9567}" type="datetimeFigureOut">
               <a:rPr lang="en-US" smtClean="0"/>
               <a:pPr/>
-              <a:t>2/3/2024</a:t>
+              <a:t>12/8/2025</a:t>
             </a:fld>
             <a:endParaRPr lang="en-US" dirty="0"/>
           </a:p>
@@ -566,7 +566,7 @@
             <a:fld id="{B61BEF0D-F0BB-DE4B-95CE-6DB70DBA9567}" type="datetimeFigureOut">
               <a:rPr lang="en-US" smtClean="0"/>
               <a:pPr/>
-              <a:t>2/3/2024</a:t>
+              <a:t>12/8/2025</a:t>
             </a:fld>
             <a:endParaRPr lang="en-US" dirty="0"/>
           </a:p>
@@ -760,7 +760,7 @@
             <a:fld id="{B61BEF0D-F0BB-DE4B-95CE-6DB70DBA9567}" type="datetimeFigureOut">
               <a:rPr lang="en-US" smtClean="0"/>
               <a:pPr/>
-              <a:t>2/3/2024</a:t>
+              <a:t>12/8/2025</a:t>
             </a:fld>
             <a:endParaRPr lang="en-US" dirty="0"/>
           </a:p>
@@ -1023,7 +1023,7 @@
             <a:fld id="{B61BEF0D-F0BB-DE4B-95CE-6DB70DBA9567}" type="datetimeFigureOut">
               <a:rPr lang="en-US" smtClean="0"/>
               <a:pPr/>
-              <a:t>2/3/2024</a:t>
+              <a:t>12/8/2025</a:t>
             </a:fld>
             <a:endParaRPr lang="en-US" dirty="0"/>
           </a:p>
@@ -1449,7 +1449,7 @@
             <a:fld id="{B61BEF0D-F0BB-DE4B-95CE-6DB70DBA9567}" type="datetimeFigureOut">
               <a:rPr lang="en-US" smtClean="0"/>
               <a:pPr/>
-              <a:t>2/3/2024</a:t>
+              <a:t>12/8/2025</a:t>
             </a:fld>
             <a:endParaRPr lang="en-US" dirty="0"/>
           </a:p>
@@ -1997,7 +1997,7 @@
             <a:fld id="{B61BEF0D-F0BB-DE4B-95CE-6DB70DBA9567}" type="datetimeFigureOut">
               <a:rPr lang="en-US" smtClean="0"/>
               <a:pPr/>
-              <a:t>2/3/2024</a:t>
+              <a:t>12/8/2025</a:t>
             </a:fld>
             <a:endParaRPr lang="en-US" dirty="0"/>
           </a:p>
@@ -2839,7 +2839,7 @@
             <a:fld id="{B61BEF0D-F0BB-DE4B-95CE-6DB70DBA9567}" type="datetimeFigureOut">
               <a:rPr lang="en-US" smtClean="0"/>
               <a:pPr/>
-              <a:t>2/3/2024</a:t>
+              <a:t>12/8/2025</a:t>
             </a:fld>
             <a:endParaRPr lang="en-US" dirty="0"/>
           </a:p>
@@ -3011,7 +3011,7 @@
             <a:fld id="{B61BEF0D-F0BB-DE4B-95CE-6DB70DBA9567}" type="datetimeFigureOut">
               <a:rPr lang="en-US" smtClean="0"/>
               <a:pPr/>
-              <a:t>2/3/2024</a:t>
+              <a:t>12/8/2025</a:t>
             </a:fld>
             <a:endParaRPr lang="en-US" dirty="0"/>
           </a:p>
@@ -3197,7 +3197,7 @@
             <a:fld id="{B61BEF0D-F0BB-DE4B-95CE-6DB70DBA9567}" type="datetimeFigureOut">
               <a:rPr lang="en-US" smtClean="0"/>
               <a:pPr/>
-              <a:t>2/3/2024</a:t>
+              <a:t>12/8/2025</a:t>
             </a:fld>
             <a:endParaRPr lang="en-US" dirty="0"/>
           </a:p>
@@ -3402,7 +3402,7 @@
           <a:p>
             <a:fld id="{1D8BD707-D9CF-40AE-B4C6-C98DA3205C09}" type="datetimeFigureOut">
               <a:rPr lang="en-US"/>
-              <a:t>2/3/2024</a:t>
+              <a:t>12/8/2025</a:t>
             </a:fld>
             <a:endParaRPr lang="en-US"/>
           </a:p>
@@ -3563,7 +3563,7 @@
             <a:fld id="{B61BEF0D-F0BB-DE4B-95CE-6DB70DBA9567}" type="datetimeFigureOut">
               <a:rPr lang="en-US" smtClean="0"/>
               <a:pPr/>
-              <a:t>2/3/2024</a:t>
+              <a:t>12/8/2025</a:t>
             </a:fld>
             <a:endParaRPr lang="en-US" dirty="0"/>
           </a:p>
@@ -3813,7 +3813,7 @@
             <a:fld id="{B61BEF0D-F0BB-DE4B-95CE-6DB70DBA9567}" type="datetimeFigureOut">
               <a:rPr lang="en-US" smtClean="0"/>
               <a:pPr/>
-              <a:t>2/3/2024</a:t>
+              <a:t>12/8/2025</a:t>
             </a:fld>
             <a:endParaRPr lang="en-US" dirty="0"/>
           </a:p>
@@ -4052,7 +4052,7 @@
             <a:fld id="{B61BEF0D-F0BB-DE4B-95CE-6DB70DBA9567}" type="datetimeFigureOut">
               <a:rPr lang="en-US" smtClean="0"/>
               <a:pPr/>
-              <a:t>2/3/2024</a:t>
+              <a:t>12/8/2025</a:t>
             </a:fld>
             <a:endParaRPr lang="en-US" dirty="0"/>
           </a:p>
@@ -4427,7 +4427,7 @@
             <a:fld id="{B61BEF0D-F0BB-DE4B-95CE-6DB70DBA9567}" type="datetimeFigureOut">
               <a:rPr lang="en-US" smtClean="0"/>
               <a:pPr/>
-              <a:t>2/3/2024</a:t>
+              <a:t>12/8/2025</a:t>
             </a:fld>
             <a:endParaRPr lang="en-US" dirty="0"/>
           </a:p>
@@ -4547,7 +4547,7 @@
             <a:fld id="{B61BEF0D-F0BB-DE4B-95CE-6DB70DBA9567}" type="datetimeFigureOut">
               <a:rPr lang="en-US" smtClean="0"/>
               <a:pPr/>
-              <a:t>2/3/2024</a:t>
+              <a:t>12/8/2025</a:t>
             </a:fld>
             <a:endParaRPr lang="en-US" dirty="0"/>
           </a:p>
@@ -4644,7 +4644,7 @@
             <a:fld id="{B61BEF0D-F0BB-DE4B-95CE-6DB70DBA9567}" type="datetimeFigureOut">
               <a:rPr lang="en-US" smtClean="0"/>
               <a:pPr/>
-              <a:t>2/3/2024</a:t>
+              <a:t>12/8/2025</a:t>
             </a:fld>
             <a:endParaRPr lang="en-US" dirty="0"/>
           </a:p>
@@ -4897,7 +4897,7 @@
             <a:fld id="{B61BEF0D-F0BB-DE4B-95CE-6DB70DBA9567}" type="datetimeFigureOut">
               <a:rPr lang="en-US" smtClean="0"/>
               <a:pPr/>
-              <a:t>2/3/2024</a:t>
+              <a:t>12/8/2025</a:t>
             </a:fld>
             <a:endParaRPr lang="en-US" dirty="0"/>
           </a:p>
@@ -5186,7 +5186,7 @@
             <a:fld id="{B61BEF0D-F0BB-DE4B-95CE-6DB70DBA9567}" type="datetimeFigureOut">
               <a:rPr lang="en-US" smtClean="0"/>
               <a:pPr/>
-              <a:t>2/3/2024</a:t>
+              <a:t>12/8/2025</a:t>
             </a:fld>
             <a:endParaRPr lang="en-US" dirty="0"/>
           </a:p>
@@ -5401,7 +5401,7 @@
             <a:fld id="{B61BEF0D-F0BB-DE4B-95CE-6DB70DBA9567}" type="datetimeFigureOut">
               <a:rPr lang="en-US" smtClean="0"/>
               <a:pPr/>
-              <a:t>2/3/2024</a:t>
+              <a:t>12/8/2025</a:t>
             </a:fld>
             <a:endParaRPr lang="en-US" dirty="0"/>
           </a:p>
@@ -11367,13 +11367,8 @@
           <a:p>
             <a:r>
               <a:rPr lang="en-US" sz="2000" dirty="0"/>
-              <a:t>The built-in function iter() function can be called with two arguments where the first argument must be a callable object (function) and second is the sentinel. The iterator calls this function until the returned value is equal to the </a:t>
-            </a:r>
-            <a:r>
-              <a:rPr lang="en-US" sz="2000" dirty="0" err="1"/>
-              <a:t>sentine</a:t>
-            </a:r>
-            <a:endParaRPr lang="en-US" sz="2000" dirty="0"/>
+              <a:t>The built-in function iter() function can be called with two arguments where the first argument must be a callable object (function) and second is the sentinel. The iterator calls this function until the returned value is equal to the sentinel.</a:t>
+            </a:r>
           </a:p>
         </p:txBody>
       </p:sp>
